--- a/videos/machine-learning/03_ridger_regression_gradient_descent/recreated_pptx/slide_044_recreated.pptx
+++ b/videos/machine-learning/03_ridger_regression_gradient_descent/recreated_pptx/slide_044_recreated.pptx
@@ -3957,6 +3957,26 @@
         </p:nvSpPr>
         <p:spPr>
           <a:xfrm>
+            <a:off x="3492500" y="1790700"/>
+            <a:ext cx="7327900" cy="4902200"/>
+          </a:xfrm>
+          <a:prstGeom prst="rect">
+            <a:avLst/>
+          </a:prstGeom>
+          <a:solidFill>
+            <a:srgbClr val="FFFFFF"/>
+          </a:solidFill>
+          <a:ln/>
+        </p:spPr>
+      </p:sp>
+      <p:sp>
+        <p:nvSpPr>
+          <p:cNvPr id="85" name="Shape 83"/>
+          <p:cNvSpPr/>
+          <p:nvPr/>
+        </p:nvSpPr>
+        <p:spPr>
+          <a:xfrm>
             <a:off x="3473450" y="1790700"/>
             <a:ext cx="0" cy="4902200"/>
           </a:xfrm>
@@ -3974,7 +3994,7 @@
       </p:sp>
       <p:sp>
         <p:nvSpPr>
-          <p:cNvPr id="85" name="Shape 83"/>
+          <p:cNvPr id="86" name="Shape 84"/>
           <p:cNvSpPr/>
           <p:nvPr/>
         </p:nvSpPr>
@@ -3997,7 +4017,7 @@
       </p:sp>
       <p:sp>
         <p:nvSpPr>
-          <p:cNvPr id="86" name="Shape 84"/>
+          <p:cNvPr id="87" name="Shape 85"/>
           <p:cNvSpPr/>
           <p:nvPr/>
         </p:nvSpPr>
@@ -4020,7 +4040,7 @@
       </p:sp>
       <p:sp>
         <p:nvSpPr>
-          <p:cNvPr id="87" name="Shape 85"/>
+          <p:cNvPr id="88" name="Shape 86"/>
           <p:cNvSpPr/>
           <p:nvPr/>
         </p:nvSpPr>
@@ -4043,7 +4063,7 @@
       </p:sp>
       <p:sp>
         <p:nvSpPr>
-          <p:cNvPr id="88" name="Shape 86"/>
+          <p:cNvPr id="89" name="Shape 87"/>
           <p:cNvSpPr/>
           <p:nvPr/>
         </p:nvSpPr>
@@ -4066,7 +4086,7 @@
       </p:sp>
       <p:sp>
         <p:nvSpPr>
-          <p:cNvPr id="89" name="Shape 87"/>
+          <p:cNvPr id="90" name="Shape 88"/>
           <p:cNvSpPr/>
           <p:nvPr/>
         </p:nvSpPr>
@@ -4089,7 +4109,7 @@
       </p:sp>
       <p:sp>
         <p:nvSpPr>
-          <p:cNvPr id="90" name="Shape 88"/>
+          <p:cNvPr id="91" name="Shape 89"/>
           <p:cNvSpPr/>
           <p:nvPr/>
         </p:nvSpPr>
@@ -4112,7 +4132,7 @@
       </p:sp>
       <p:sp>
         <p:nvSpPr>
-          <p:cNvPr id="91" name="Shape 89"/>
+          <p:cNvPr id="92" name="Shape 90"/>
           <p:cNvSpPr/>
           <p:nvPr/>
         </p:nvSpPr>
@@ -4135,7 +4155,7 @@
       </p:sp>
       <p:sp>
         <p:nvSpPr>
-          <p:cNvPr id="92" name="Shape 90"/>
+          <p:cNvPr id="93" name="Shape 91"/>
           <p:cNvSpPr/>
           <p:nvPr/>
         </p:nvSpPr>
@@ -4158,7 +4178,7 @@
       </p:sp>
       <p:sp>
         <p:nvSpPr>
-          <p:cNvPr id="93" name="Shape 91"/>
+          <p:cNvPr id="94" name="Shape 92"/>
           <p:cNvSpPr/>
           <p:nvPr/>
         </p:nvSpPr>
@@ -4181,7 +4201,7 @@
       </p:sp>
       <p:sp>
         <p:nvSpPr>
-          <p:cNvPr id="94" name="Shape 92"/>
+          <p:cNvPr id="95" name="Shape 93"/>
           <p:cNvSpPr/>
           <p:nvPr/>
         </p:nvSpPr>
@@ -4204,7 +4224,7 @@
       </p:sp>
       <p:sp>
         <p:nvSpPr>
-          <p:cNvPr id="95" name="Shape 93"/>
+          <p:cNvPr id="96" name="Shape 94"/>
           <p:cNvSpPr/>
           <p:nvPr/>
         </p:nvSpPr>
@@ -4227,7 +4247,7 @@
       </p:sp>
       <p:sp>
         <p:nvSpPr>
-          <p:cNvPr id="96" name="Shape 94"/>
+          <p:cNvPr id="97" name="Shape 95"/>
           <p:cNvSpPr/>
           <p:nvPr/>
         </p:nvSpPr>
@@ -4250,7 +4270,7 @@
       </p:sp>
       <p:pic>
         <p:nvPicPr>
-          <p:cNvPr id="97" name="Image 0" descr="/workspaces/codespaces-blank/ai_llm_slides/videos/machine-learning/03_ridger_regression_gradient_descent/recreated_pptx/build/assets/eq_044_dx1.png">    </p:cNvPr>
+          <p:cNvPr id="98" name="Image 0" descr="/workspaces/codespaces-blank/ai_llm_slides/videos/machine-learning/03_ridger_regression_gradient_descent/recreated_pptx/build/assets/eq_044_dx1.png">    </p:cNvPr>
           <p:cNvPicPr>
             <a:picLocks noChangeAspect="1"/>
           </p:cNvPicPr>
@@ -4274,7 +4294,7 @@
       </p:pic>
       <p:sp>
         <p:nvSpPr>
-          <p:cNvPr id="98" name="Text 95"/>
+          <p:cNvPr id="99" name="Text 96"/>
           <p:cNvSpPr/>
           <p:nvPr/>
         </p:nvSpPr>
@@ -4313,7 +4333,7 @@
       </p:sp>
       <p:pic>
         <p:nvPicPr>
-          <p:cNvPr id="99" name="Image 1" descr="/workspaces/codespaces-blank/ai_llm_slides/videos/machine-learning/03_ridger_regression_gradient_descent/recreated_pptx/build/assets/eq_044_w1.png">    </p:cNvPr>
+          <p:cNvPr id="100" name="Image 1" descr="/workspaces/codespaces-blank/ai_llm_slides/videos/machine-learning/03_ridger_regression_gradient_descent/recreated_pptx/build/assets/eq_044_w1.png">    </p:cNvPr>
           <p:cNvPicPr>
             <a:picLocks noChangeAspect="1"/>
           </p:cNvPicPr>
@@ -4337,7 +4357,7 @@
       </p:pic>
       <p:pic>
         <p:nvPicPr>
-          <p:cNvPr id="100" name="Image 2" descr="/workspaces/codespaces-blank/ai_llm_slides/videos/machine-learning/03_ridger_regression_gradient_descent/recreated_pptx/build/assets/eq_044_dx2.png">    </p:cNvPr>
+          <p:cNvPr id="101" name="Image 2" descr="/workspaces/codespaces-blank/ai_llm_slides/videos/machine-learning/03_ridger_regression_gradient_descent/recreated_pptx/build/assets/eq_044_dx2.png">    </p:cNvPr>
           <p:cNvPicPr>
             <a:picLocks noChangeAspect="1"/>
           </p:cNvPicPr>
@@ -4361,7 +4381,7 @@
       </p:pic>
       <p:sp>
         <p:nvSpPr>
-          <p:cNvPr id="101" name="Text 96"/>
+          <p:cNvPr id="102" name="Text 97"/>
           <p:cNvSpPr/>
           <p:nvPr/>
         </p:nvSpPr>
@@ -4400,7 +4420,7 @@
       </p:sp>
       <p:pic>
         <p:nvPicPr>
-          <p:cNvPr id="102" name="Image 3" descr="/workspaces/codespaces-blank/ai_llm_slides/videos/machine-learning/03_ridger_regression_gradient_descent/recreated_pptx/build/assets/eq_044_w2.png">    </p:cNvPr>
+          <p:cNvPr id="103" name="Image 3" descr="/workspaces/codespaces-blank/ai_llm_slides/videos/machine-learning/03_ridger_regression_gradient_descent/recreated_pptx/build/assets/eq_044_w2.png">    </p:cNvPr>
           <p:cNvPicPr>
             <a:picLocks noChangeAspect="1"/>
           </p:cNvPicPr>
@@ -4424,7 +4444,7 @@
       </p:pic>
       <p:pic>
         <p:nvPicPr>
-          <p:cNvPr id="103" name="Image 4" descr="/workspaces/codespaces-blank/ai_llm_slides/videos/machine-learning/03_ridger_regression_gradient_descent/recreated_pptx/build/assets/eq_044_dx3.png">    </p:cNvPr>
+          <p:cNvPr id="104" name="Image 4" descr="/workspaces/codespaces-blank/ai_llm_slides/videos/machine-learning/03_ridger_regression_gradient_descent/recreated_pptx/build/assets/eq_044_dx3.png">    </p:cNvPr>
           <p:cNvPicPr>
             <a:picLocks noChangeAspect="1"/>
           </p:cNvPicPr>
@@ -4448,7 +4468,7 @@
       </p:pic>
       <p:sp>
         <p:nvSpPr>
-          <p:cNvPr id="104" name="Text 97"/>
+          <p:cNvPr id="105" name="Text 98"/>
           <p:cNvSpPr/>
           <p:nvPr/>
         </p:nvSpPr>
@@ -4487,7 +4507,7 @@
       </p:sp>
       <p:pic>
         <p:nvPicPr>
-          <p:cNvPr id="105" name="Image 5" descr="/workspaces/codespaces-blank/ai_llm_slides/videos/machine-learning/03_ridger_regression_gradient_descent/recreated_pptx/build/assets/eq_044_w3.png">    </p:cNvPr>
+          <p:cNvPr id="106" name="Image 5" descr="/workspaces/codespaces-blank/ai_llm_slides/videos/machine-learning/03_ridger_regression_gradient_descent/recreated_pptx/build/assets/eq_044_w3.png">    </p:cNvPr>
           <p:cNvPicPr>
             <a:picLocks noChangeAspect="1"/>
           </p:cNvPicPr>
@@ -4511,7 +4531,7 @@
       </p:pic>
       <p:pic>
         <p:nvPicPr>
-          <p:cNvPr id="106" name="Image 6" descr="/workspaces/codespaces-blank/ai_llm_slides/videos/machine-learning/03_ridger_regression_gradient_descent/recreated_pptx/build/assets/eq_044_dx4.png">    </p:cNvPr>
+          <p:cNvPr id="107" name="Image 6" descr="/workspaces/codespaces-blank/ai_llm_slides/videos/machine-learning/03_ridger_regression_gradient_descent/recreated_pptx/build/assets/eq_044_dx4.png">    </p:cNvPr>
           <p:cNvPicPr>
             <a:picLocks noChangeAspect="1"/>
           </p:cNvPicPr>
@@ -4535,7 +4555,7 @@
       </p:pic>
       <p:sp>
         <p:nvSpPr>
-          <p:cNvPr id="107" name="Text 98"/>
+          <p:cNvPr id="108" name="Text 99"/>
           <p:cNvSpPr/>
           <p:nvPr/>
         </p:nvSpPr>
@@ -4574,7 +4594,7 @@
       </p:sp>
       <p:pic>
         <p:nvPicPr>
-          <p:cNvPr id="108" name="Image 7" descr="/workspaces/codespaces-blank/ai_llm_slides/videos/machine-learning/03_ridger_regression_gradient_descent/recreated_pptx/build/assets/eq_044_w4.png">    </p:cNvPr>
+          <p:cNvPr id="109" name="Image 7" descr="/workspaces/codespaces-blank/ai_llm_slides/videos/machine-learning/03_ridger_regression_gradient_descent/recreated_pptx/build/assets/eq_044_w4.png">    </p:cNvPr>
           <p:cNvPicPr>
             <a:picLocks noChangeAspect="1"/>
           </p:cNvPicPr>
@@ -4598,7 +4618,7 @@
       </p:pic>
       <p:pic>
         <p:nvPicPr>
-          <p:cNvPr id="109" name="Image 8" descr="/workspaces/codespaces-blank/ai_llm_slides/videos/machine-learning/03_ridger_regression_gradient_descent/recreated_pptx/build/assets/eq_044_dx5.png">    </p:cNvPr>
+          <p:cNvPr id="110" name="Image 8" descr="/workspaces/codespaces-blank/ai_llm_slides/videos/machine-learning/03_ridger_regression_gradient_descent/recreated_pptx/build/assets/eq_044_dx5.png">    </p:cNvPr>
           <p:cNvPicPr>
             <a:picLocks noChangeAspect="1"/>
           </p:cNvPicPr>
@@ -4622,7 +4642,7 @@
       </p:pic>
       <p:sp>
         <p:nvSpPr>
-          <p:cNvPr id="110" name="Text 99"/>
+          <p:cNvPr id="111" name="Text 100"/>
           <p:cNvSpPr/>
           <p:nvPr/>
         </p:nvSpPr>
@@ -4661,7 +4681,7 @@
       </p:sp>
       <p:pic>
         <p:nvPicPr>
-          <p:cNvPr id="111" name="Image 9" descr="/workspaces/codespaces-blank/ai_llm_slides/videos/machine-learning/03_ridger_regression_gradient_descent/recreated_pptx/build/assets/eq_044_w5.png">    </p:cNvPr>
+          <p:cNvPr id="112" name="Image 9" descr="/workspaces/codespaces-blank/ai_llm_slides/videos/machine-learning/03_ridger_regression_gradient_descent/recreated_pptx/build/assets/eq_044_w5.png">    </p:cNvPr>
           <p:cNvPicPr>
             <a:picLocks noChangeAspect="1"/>
           </p:cNvPicPr>
@@ -4685,7 +4705,7 @@
       </p:pic>
       <p:pic>
         <p:nvPicPr>
-          <p:cNvPr id="112" name="Image 10" descr="/workspaces/codespaces-blank/ai_llm_slides/videos/machine-learning/03_ridger_regression_gradient_descent/recreated_pptx/build/assets/eq_044_dx6.png">    </p:cNvPr>
+          <p:cNvPr id="113" name="Image 10" descr="/workspaces/codespaces-blank/ai_llm_slides/videos/machine-learning/03_ridger_regression_gradient_descent/recreated_pptx/build/assets/eq_044_dx6.png">    </p:cNvPr>
           <p:cNvPicPr>
             <a:picLocks noChangeAspect="1"/>
           </p:cNvPicPr>
@@ -4709,7 +4729,7 @@
       </p:pic>
       <p:sp>
         <p:nvSpPr>
-          <p:cNvPr id="113" name="Text 100"/>
+          <p:cNvPr id="114" name="Text 101"/>
           <p:cNvSpPr/>
           <p:nvPr/>
         </p:nvSpPr>
@@ -4748,7 +4768,7 @@
       </p:sp>
       <p:pic>
         <p:nvPicPr>
-          <p:cNvPr id="114" name="Image 11" descr="/workspaces/codespaces-blank/ai_llm_slides/videos/machine-learning/03_ridger_regression_gradient_descent/recreated_pptx/build/assets/eq_044_w6.png">    </p:cNvPr>
+          <p:cNvPr id="115" name="Image 11" descr="/workspaces/codespaces-blank/ai_llm_slides/videos/machine-learning/03_ridger_regression_gradient_descent/recreated_pptx/build/assets/eq_044_w6.png">    </p:cNvPr>
           <p:cNvPicPr>
             <a:picLocks noChangeAspect="1"/>
           </p:cNvPicPr>
@@ -4772,7 +4792,7 @@
       </p:pic>
       <p:sp>
         <p:nvSpPr>
-          <p:cNvPr id="115" name="Shape 101"/>
+          <p:cNvPr id="116" name="Shape 102"/>
           <p:cNvSpPr/>
           <p:nvPr/>
         </p:nvSpPr>
@@ -4794,7 +4814,7 @@
       </p:sp>
       <p:sp>
         <p:nvSpPr>
-          <p:cNvPr id="116" name="Text 102"/>
+          <p:cNvPr id="117" name="Text 103"/>
           <p:cNvSpPr/>
           <p:nvPr/>
         </p:nvSpPr>
